--- a/ゲーム科1年/01_後期/ゲームプログラミングⅢ/ゲーム数学/実習/00_坂道の移動.pptx
+++ b/ゲーム科1年/01_後期/ゲームプログラミングⅢ/ゲーム数学/実習/00_坂道の移動.pptx
@@ -12,8 +12,7 @@
     <p:sldId id="260" r:id="rId6"/>
     <p:sldId id="261" r:id="rId7"/>
     <p:sldId id="262" r:id="rId8"/>
-    <p:sldId id="263" r:id="rId9"/>
-    <p:sldId id="264" r:id="rId10"/>
+    <p:sldId id="264" r:id="rId9"/>
   </p:sldIdLst>
   <p:sldSz cx="12192000" cy="6858000"/>
   <p:notesSz cx="6858000" cy="9144000"/>
@@ -267,7 +266,7 @@
           <a:p>
             <a:fld id="{E9CC885B-4903-4D54-9A93-00025F12DED9}" type="datetimeFigureOut">
               <a:rPr kumimoji="1" lang="ja-JP" altLang="en-US" smtClean="0"/>
-              <a:t>2026/2/19</a:t>
+              <a:t>2026/9/8</a:t>
             </a:fld>
             <a:endParaRPr kumimoji="1" lang="ja-JP" altLang="en-US"/>
           </a:p>
@@ -497,7 +496,7 @@
           <a:p>
             <a:fld id="{E9CC885B-4903-4D54-9A93-00025F12DED9}" type="datetimeFigureOut">
               <a:rPr kumimoji="1" lang="ja-JP" altLang="en-US" smtClean="0"/>
-              <a:t>2026/2/19</a:t>
+              <a:t>2026/9/8</a:t>
             </a:fld>
             <a:endParaRPr kumimoji="1" lang="ja-JP" altLang="en-US"/>
           </a:p>
@@ -737,7 +736,7 @@
           <a:p>
             <a:fld id="{E9CC885B-4903-4D54-9A93-00025F12DED9}" type="datetimeFigureOut">
               <a:rPr kumimoji="1" lang="ja-JP" altLang="en-US" smtClean="0"/>
-              <a:t>2026/2/19</a:t>
+              <a:t>2026/9/8</a:t>
             </a:fld>
             <a:endParaRPr kumimoji="1" lang="ja-JP" altLang="en-US"/>
           </a:p>
@@ -967,7 +966,7 @@
           <a:p>
             <a:fld id="{E9CC885B-4903-4D54-9A93-00025F12DED9}" type="datetimeFigureOut">
               <a:rPr kumimoji="1" lang="ja-JP" altLang="en-US" smtClean="0"/>
-              <a:t>2026/2/19</a:t>
+              <a:t>2026/9/8</a:t>
             </a:fld>
             <a:endParaRPr kumimoji="1" lang="ja-JP" altLang="en-US"/>
           </a:p>
@@ -1242,7 +1241,7 @@
           <a:p>
             <a:fld id="{E9CC885B-4903-4D54-9A93-00025F12DED9}" type="datetimeFigureOut">
               <a:rPr kumimoji="1" lang="ja-JP" altLang="en-US" smtClean="0"/>
-              <a:t>2026/2/19</a:t>
+              <a:t>2026/9/8</a:t>
             </a:fld>
             <a:endParaRPr kumimoji="1" lang="ja-JP" altLang="en-US"/>
           </a:p>
@@ -1571,7 +1570,7 @@
           <a:p>
             <a:fld id="{E9CC885B-4903-4D54-9A93-00025F12DED9}" type="datetimeFigureOut">
               <a:rPr kumimoji="1" lang="ja-JP" altLang="en-US" smtClean="0"/>
-              <a:t>2026/2/19</a:t>
+              <a:t>2026/9/8</a:t>
             </a:fld>
             <a:endParaRPr kumimoji="1" lang="ja-JP" altLang="en-US"/>
           </a:p>
@@ -2047,7 +2046,7 @@
           <a:p>
             <a:fld id="{E9CC885B-4903-4D54-9A93-00025F12DED9}" type="datetimeFigureOut">
               <a:rPr kumimoji="1" lang="ja-JP" altLang="en-US" smtClean="0"/>
-              <a:t>2026/2/19</a:t>
+              <a:t>2026/9/8</a:t>
             </a:fld>
             <a:endParaRPr kumimoji="1" lang="ja-JP" altLang="en-US"/>
           </a:p>
@@ -2188,7 +2187,7 @@
           <a:p>
             <a:fld id="{E9CC885B-4903-4D54-9A93-00025F12DED9}" type="datetimeFigureOut">
               <a:rPr kumimoji="1" lang="ja-JP" altLang="en-US" smtClean="0"/>
-              <a:t>2026/2/19</a:t>
+              <a:t>2026/9/8</a:t>
             </a:fld>
             <a:endParaRPr kumimoji="1" lang="ja-JP" altLang="en-US"/>
           </a:p>
@@ -2301,7 +2300,7 @@
           <a:p>
             <a:fld id="{E9CC885B-4903-4D54-9A93-00025F12DED9}" type="datetimeFigureOut">
               <a:rPr kumimoji="1" lang="ja-JP" altLang="en-US" smtClean="0"/>
-              <a:t>2026/2/19</a:t>
+              <a:t>2026/9/8</a:t>
             </a:fld>
             <a:endParaRPr kumimoji="1" lang="ja-JP" altLang="en-US"/>
           </a:p>
@@ -2644,7 +2643,7 @@
           <a:p>
             <a:fld id="{E9CC885B-4903-4D54-9A93-00025F12DED9}" type="datetimeFigureOut">
               <a:rPr kumimoji="1" lang="ja-JP" altLang="en-US" smtClean="0"/>
-              <a:t>2026/2/19</a:t>
+              <a:t>2026/9/8</a:t>
             </a:fld>
             <a:endParaRPr kumimoji="1" lang="ja-JP" altLang="en-US"/>
           </a:p>
@@ -2932,7 +2931,7 @@
           <a:p>
             <a:fld id="{E9CC885B-4903-4D54-9A93-00025F12DED9}" type="datetimeFigureOut">
               <a:rPr kumimoji="1" lang="ja-JP" altLang="en-US" smtClean="0"/>
-              <a:t>2026/2/19</a:t>
+              <a:t>2026/9/8</a:t>
             </a:fld>
             <a:endParaRPr kumimoji="1" lang="ja-JP" altLang="en-US"/>
           </a:p>
@@ -3205,7 +3204,7 @@
           <a:p>
             <a:fld id="{E9CC885B-4903-4D54-9A93-00025F12DED9}" type="datetimeFigureOut">
               <a:rPr kumimoji="1" lang="ja-JP" altLang="en-US" smtClean="0"/>
-              <a:t>2026/2/19</a:t>
+              <a:t>2026/9/8</a:t>
             </a:fld>
             <a:endParaRPr kumimoji="1" lang="ja-JP" altLang="en-US"/>
           </a:p>
@@ -3829,8 +3828,8 @@
           </a:p>
         </p:txBody>
       </p:sp>
-      <mc:AlternateContent xmlns:mc="http://schemas.openxmlformats.org/markup-compatibility/2006" xmlns:a14="http://schemas.microsoft.com/office/drawing/2010/main">
-        <mc:Choice Requires="a14">
+      <mc:AlternateContent xmlns:mc="http://schemas.openxmlformats.org/markup-compatibility/2006">
+        <mc:Choice xmlns:a14="http://schemas.microsoft.com/office/drawing/2010/main" Requires="a14">
           <p:sp>
             <p:nvSpPr>
               <p:cNvPr id="6" name="テキスト ボックス 5">
@@ -4066,7 +4065,7 @@
                       <a:rPr kumimoji="1" lang="en-US" altLang="ja-JP" sz="2400" b="0" i="1" smtClean="0">
                         <a:latin typeface="Cambria Math" panose="02040503050406030204" pitchFamily="18" charset="0"/>
                       </a:rPr>
-                      <m:t>𝑎</m:t>
+                      <m:t>𝑚</m:t>
                     </m:r>
                   </m:oMath>
                 </a14:m>
@@ -4167,7 +4166,7 @@
             </p:txBody>
           </p:sp>
         </mc:Choice>
-        <mc:Fallback xmlns="">
+        <mc:Fallback>
           <p:sp>
             <p:nvSpPr>
               <p:cNvPr id="6" name="テキスト ボックス 5">
@@ -5509,18 +5508,13 @@
                   <a:t>座標・・・</a:t>
                 </a:r>
                 <a:r>
-                  <a:rPr lang="en-US" altLang="ja-JP" sz="2400" b="1" dirty="0" err="1">
+                  <a:rPr lang="en-US" altLang="ja-JP" sz="2400" b="1" dirty="0">
                     <a:solidFill>
                       <a:srgbClr val="0070C0"/>
                     </a:solidFill>
                   </a:rPr>
-                  <a:t>playerFootX</a:t>
+                  <a:t>x</a:t>
                 </a:r>
-                <a:endParaRPr lang="en-US" altLang="ja-JP" sz="2400" b="1" dirty="0">
-                  <a:solidFill>
-                    <a:srgbClr val="0070C0"/>
-                  </a:solidFill>
-                </a:endParaRPr>
               </a:p>
               <a:p>
                 <a:endParaRPr kumimoji="1" lang="en-US" altLang="ja-JP" sz="2400" dirty="0">
@@ -5598,331 +5592,6 @@
 </file>
 
 <file path=ppt/slides/slide8.xml><?xml version="1.0" encoding="utf-8"?>
-<p:sld xmlns:a="http://schemas.openxmlformats.org/drawingml/2006/main" xmlns:r="http://schemas.openxmlformats.org/officeDocument/2006/relationships" xmlns:p="http://schemas.openxmlformats.org/presentationml/2006/main">
-  <p:cSld>
-    <p:spTree>
-      <p:nvGrpSpPr>
-        <p:cNvPr id="1" name=""/>
-        <p:cNvGrpSpPr/>
-        <p:nvPr/>
-      </p:nvGrpSpPr>
-      <p:grpSpPr>
-        <a:xfrm>
-          <a:off x="0" y="0"/>
-          <a:ext cx="0" cy="0"/>
-          <a:chOff x="0" y="0"/>
-          <a:chExt cx="0" cy="0"/>
-        </a:xfrm>
-      </p:grpSpPr>
-      <p:sp>
-        <p:nvSpPr>
-          <p:cNvPr id="4" name="テキスト ボックス 3">
-            <a:extLst>
-              <a:ext uri="{FF2B5EF4-FFF2-40B4-BE49-F238E27FC236}">
-                <a16:creationId xmlns:a16="http://schemas.microsoft.com/office/drawing/2014/main" id="{5A13BF46-B8C5-48AA-8308-C9ECFF431A18}"/>
-              </a:ext>
-            </a:extLst>
-          </p:cNvPr>
-          <p:cNvSpPr txBox="1"/>
-          <p:nvPr/>
-        </p:nvSpPr>
-        <p:spPr>
-          <a:xfrm>
-            <a:off x="567542" y="491954"/>
-            <a:ext cx="2236510" cy="584775"/>
-          </a:xfrm>
-          <a:prstGeom prst="rect">
-            <a:avLst/>
-          </a:prstGeom>
-          <a:noFill/>
-        </p:spPr>
-        <p:txBody>
-          <a:bodyPr wrap="none" rtlCol="0">
-            <a:spAutoFit/>
-          </a:bodyPr>
-          <a:lstStyle/>
-          <a:p>
-            <a:r>
-              <a:rPr kumimoji="1" lang="ja-JP" altLang="en-US" sz="3200" b="1" u="sng" dirty="0"/>
-              <a:t>坂道の移動</a:t>
-            </a:r>
-          </a:p>
-        </p:txBody>
-      </p:sp>
-      <mc:AlternateContent xmlns:mc="http://schemas.openxmlformats.org/markup-compatibility/2006">
-        <mc:Choice xmlns:a14="http://schemas.microsoft.com/office/drawing/2010/main" Requires="a14">
-          <p:sp>
-            <p:nvSpPr>
-              <p:cNvPr id="6" name="テキスト ボックス 5">
-                <a:extLst>
-                  <a:ext uri="{FF2B5EF4-FFF2-40B4-BE49-F238E27FC236}">
-                    <a16:creationId xmlns:a16="http://schemas.microsoft.com/office/drawing/2014/main" id="{55830AD6-028B-4C4E-80BF-B70DFC1C3A46}"/>
-                  </a:ext>
-                </a:extLst>
-              </p:cNvPr>
-              <p:cNvSpPr txBox="1"/>
-              <p:nvPr/>
-            </p:nvSpPr>
-            <p:spPr>
-              <a:xfrm>
-                <a:off x="567542" y="1216429"/>
-                <a:ext cx="10737235" cy="3416513"/>
-              </a:xfrm>
-              <a:prstGeom prst="rect">
-                <a:avLst/>
-              </a:prstGeom>
-              <a:noFill/>
-            </p:spPr>
-            <p:txBody>
-              <a:bodyPr wrap="none" rtlCol="0">
-                <a:spAutoFit/>
-              </a:bodyPr>
-              <a:lstStyle/>
-              <a:p>
-                <a:r>
-                  <a:rPr kumimoji="1" lang="ja-JP" altLang="en-US" sz="2400" dirty="0"/>
-                  <a:t>③ 傾き、切片、プレイヤーの足元の座標から、坂の高さを求めます。</a:t>
-                </a:r>
-                <a:endParaRPr kumimoji="1" lang="en-US" altLang="ja-JP" sz="2400" dirty="0"/>
-              </a:p>
-              <a:p>
-                <a:endParaRPr lang="en-US" altLang="ja-JP" sz="2400" dirty="0"/>
-              </a:p>
-              <a:p>
-                <a:pPr/>
-                <a14:m>
-                  <m:oMathPara xmlns:m="http://schemas.openxmlformats.org/officeDocument/2006/math">
-                    <m:oMathParaPr>
-                      <m:jc m:val="left"/>
-                    </m:oMathParaPr>
-                    <m:oMath xmlns:m="http://schemas.openxmlformats.org/officeDocument/2006/math">
-                      <m:r>
-                        <a:rPr kumimoji="1" lang="en-US" altLang="ja-JP" sz="2400" b="0" i="1" smtClean="0">
-                          <a:latin typeface="Cambria Math" panose="02040503050406030204" pitchFamily="18" charset="0"/>
-                        </a:rPr>
-                        <m:t>𝑦</m:t>
-                      </m:r>
-                      <m:r>
-                        <a:rPr kumimoji="1" lang="en-US" altLang="ja-JP" sz="2400" b="0" i="1" smtClean="0">
-                          <a:latin typeface="Cambria Math" panose="02040503050406030204" pitchFamily="18" charset="0"/>
-                        </a:rPr>
-                        <m:t>=</m:t>
-                      </m:r>
-                      <m:r>
-                        <a:rPr kumimoji="1" lang="en-US" altLang="ja-JP" sz="2400" b="0" i="1" smtClean="0">
-                          <a:latin typeface="Cambria Math" panose="02040503050406030204" pitchFamily="18" charset="0"/>
-                        </a:rPr>
-                        <m:t>𝑚𝑥</m:t>
-                      </m:r>
-                      <m:r>
-                        <a:rPr kumimoji="1" lang="en-US" altLang="ja-JP" sz="2400" b="0" i="1" smtClean="0">
-                          <a:latin typeface="Cambria Math" panose="02040503050406030204" pitchFamily="18" charset="0"/>
-                        </a:rPr>
-                        <m:t>+</m:t>
-                      </m:r>
-                      <m:r>
-                        <a:rPr kumimoji="1" lang="en-US" altLang="ja-JP" sz="2400" b="0" i="1" smtClean="0">
-                          <a:latin typeface="Cambria Math" panose="02040503050406030204" pitchFamily="18" charset="0"/>
-                        </a:rPr>
-                        <m:t>𝑏</m:t>
-                      </m:r>
-                    </m:oMath>
-                  </m:oMathPara>
-                </a14:m>
-                <a:endParaRPr kumimoji="1" lang="en-US" altLang="ja-JP" sz="2400" dirty="0"/>
-              </a:p>
-              <a:p>
-                <a14:m>
-                  <m:oMath xmlns:m="http://schemas.openxmlformats.org/officeDocument/2006/math">
-                    <m:r>
-                      <a:rPr lang="ja-JP" altLang="en-US" sz="2400" b="0" i="1" dirty="0">
-                        <a:latin typeface="Cambria Math" panose="02040503050406030204" pitchFamily="18" charset="0"/>
-                      </a:rPr>
-                      <m:t>坂道の高さ</m:t>
-                    </m:r>
-                    <m:r>
-                      <a:rPr kumimoji="1" lang="en-US" altLang="ja-JP" sz="2400" b="0" i="1" smtClean="0">
-                        <a:latin typeface="Cambria Math" panose="02040503050406030204" pitchFamily="18" charset="0"/>
-                      </a:rPr>
-                      <m:t>=</m:t>
-                    </m:r>
-                    <m:r>
-                      <a:rPr lang="ja-JP" altLang="en-US" sz="2400" i="1">
-                        <a:latin typeface="Cambria Math" panose="02040503050406030204" pitchFamily="18" charset="0"/>
-                      </a:rPr>
-                      <m:t>傾き</m:t>
-                    </m:r>
-                    <m:r>
-                      <a:rPr lang="en-US" altLang="ja-JP" sz="2400" i="1" smtClean="0">
-                        <a:latin typeface="Cambria Math" panose="02040503050406030204" pitchFamily="18" charset="0"/>
-                      </a:rPr>
-                      <m:t>×</m:t>
-                    </m:r>
-                    <m:r>
-                      <a:rPr lang="ja-JP" altLang="en-US" sz="2400" i="1">
-                        <a:latin typeface="Cambria Math" panose="02040503050406030204" pitchFamily="18" charset="0"/>
-                      </a:rPr>
-                      <m:t>足元</m:t>
-                    </m:r>
-                    <m:r>
-                      <a:rPr lang="en-US" altLang="ja-JP" sz="2400" b="0" i="1" smtClean="0">
-                        <a:latin typeface="Cambria Math" panose="02040503050406030204" pitchFamily="18" charset="0"/>
-                      </a:rPr>
-                      <m:t>𝑋</m:t>
-                    </m:r>
-                    <m:r>
-                      <a:rPr kumimoji="1" lang="en-US" altLang="ja-JP" sz="2400" b="0" i="1" smtClean="0">
-                        <a:latin typeface="Cambria Math" panose="02040503050406030204" pitchFamily="18" charset="0"/>
-                      </a:rPr>
-                      <m:t>+</m:t>
-                    </m:r>
-                    <m:r>
-                      <a:rPr lang="ja-JP" altLang="en-US" sz="2400" i="1">
-                        <a:latin typeface="Cambria Math" panose="02040503050406030204" pitchFamily="18" charset="0"/>
-                      </a:rPr>
-                      <m:t>切片</m:t>
-                    </m:r>
-                  </m:oMath>
-                </a14:m>
-                <a:r>
-                  <a:rPr kumimoji="1" lang="en-US" altLang="ja-JP" sz="2400" dirty="0"/>
-                  <a:t>	</a:t>
-                </a:r>
-                <a:r>
-                  <a:rPr kumimoji="1" lang="ja-JP" altLang="en-US" sz="2400" dirty="0"/>
-                  <a:t>・・・</a:t>
-                </a:r>
-                <a:r>
-                  <a:rPr lang="en-US" altLang="ja-JP" sz="2400" dirty="0"/>
-                  <a:t> </a:t>
-                </a:r>
-                <a:r>
-                  <a:rPr kumimoji="1" lang="ja-JP" altLang="en-US" sz="2400" dirty="0"/>
-                  <a:t>わかっている要素を置き換え</a:t>
-                </a:r>
-                <a:endParaRPr kumimoji="1" lang="en-US" altLang="ja-JP" sz="2400" dirty="0"/>
-              </a:p>
-              <a:p>
-                <a:endParaRPr lang="en-US" altLang="ja-JP" sz="2400" dirty="0"/>
-              </a:p>
-              <a:p>
-                <a:r>
-                  <a:rPr kumimoji="1" lang="ja-JP" altLang="en-US" sz="2400" dirty="0"/>
-                  <a:t>足元の</a:t>
-                </a:r>
-                <a:r>
-                  <a:rPr kumimoji="1" lang="en-US" altLang="ja-JP" sz="2400" dirty="0"/>
-                  <a:t>X</a:t>
-                </a:r>
-                <a:r>
-                  <a:rPr kumimoji="1" lang="ja-JP" altLang="en-US" sz="2400" dirty="0"/>
-                  <a:t>座標はすでに用意しています。</a:t>
-                </a:r>
-                <a:endParaRPr kumimoji="1" lang="en-US" altLang="ja-JP" sz="2400" dirty="0"/>
-              </a:p>
-              <a:p>
-                <a:r>
-                  <a:rPr lang="ja-JP" altLang="en-US" sz="2400" dirty="0"/>
-                  <a:t>足元の</a:t>
-                </a:r>
-                <a:r>
-                  <a:rPr lang="en-US" altLang="ja-JP" sz="2400" dirty="0"/>
-                  <a:t>X</a:t>
-                </a:r>
-                <a:r>
-                  <a:rPr lang="ja-JP" altLang="en-US" sz="2400" dirty="0"/>
-                  <a:t>座標・・・</a:t>
-                </a:r>
-                <a:r>
-                  <a:rPr lang="en-US" altLang="ja-JP" sz="2400" b="1" dirty="0" err="1">
-                    <a:solidFill>
-                      <a:srgbClr val="0070C0"/>
-                    </a:solidFill>
-                  </a:rPr>
-                  <a:t>playerFootX</a:t>
-                </a:r>
-                <a:endParaRPr lang="en-US" altLang="ja-JP" sz="2400" b="1" dirty="0">
-                  <a:solidFill>
-                    <a:srgbClr val="0070C0"/>
-                  </a:solidFill>
-                </a:endParaRPr>
-              </a:p>
-              <a:p>
-                <a:endParaRPr kumimoji="1" lang="en-US" altLang="ja-JP" sz="2400" dirty="0">
-                  <a:solidFill>
-                    <a:srgbClr val="0070C0"/>
-                  </a:solidFill>
-                </a:endParaRPr>
-              </a:p>
-              <a:p>
-                <a:r>
-                  <a:rPr lang="ja-JP" altLang="en-US" sz="2400" dirty="0"/>
-                  <a:t>正しく計算できていれば、坂道を上ることができます。</a:t>
-                </a:r>
-                <a:endParaRPr kumimoji="1" lang="en-US" altLang="ja-JP" sz="2400" dirty="0"/>
-              </a:p>
-            </p:txBody>
-          </p:sp>
-        </mc:Choice>
-        <mc:Fallback>
-          <p:sp>
-            <p:nvSpPr>
-              <p:cNvPr id="6" name="テキスト ボックス 5">
-                <a:extLst>
-                  <a:ext uri="{FF2B5EF4-FFF2-40B4-BE49-F238E27FC236}">
-                    <a16:creationId xmlns:a16="http://schemas.microsoft.com/office/drawing/2014/main" id="{55830AD6-028B-4C4E-80BF-B70DFC1C3A46}"/>
-                  </a:ext>
-                </a:extLst>
-              </p:cNvPr>
-              <p:cNvSpPr txBox="1">
-                <a:spLocks noRot="1" noChangeAspect="1" noMove="1" noResize="1" noEditPoints="1" noAdjustHandles="1" noChangeArrowheads="1" noChangeShapeType="1" noTextEdit="1"/>
-              </p:cNvSpPr>
-              <p:nvPr/>
-            </p:nvSpPr>
-            <p:spPr>
-              <a:xfrm>
-                <a:off x="567542" y="1216429"/>
-                <a:ext cx="10737235" cy="3416513"/>
-              </a:xfrm>
-              <a:prstGeom prst="rect">
-                <a:avLst/>
-              </a:prstGeom>
-              <a:blipFill>
-                <a:blip r:embed="rId2"/>
-                <a:stretch>
-                  <a:fillRect l="-852" t="-1429" b="-3214"/>
-                </a:stretch>
-              </a:blipFill>
-            </p:spPr>
-            <p:txBody>
-              <a:bodyPr/>
-              <a:lstStyle/>
-              <a:p>
-                <a:r>
-                  <a:rPr lang="ja-JP" altLang="en-US">
-                    <a:noFill/>
-                  </a:rPr>
-                  <a:t> </a:t>
-                </a:r>
-              </a:p>
-            </p:txBody>
-          </p:sp>
-        </mc:Fallback>
-      </mc:AlternateContent>
-    </p:spTree>
-    <p:extLst>
-      <p:ext uri="{BB962C8B-B14F-4D97-AF65-F5344CB8AC3E}">
-        <p14:creationId xmlns:p14="http://schemas.microsoft.com/office/powerpoint/2010/main" val="3596630332"/>
-      </p:ext>
-    </p:extLst>
-  </p:cSld>
-  <p:clrMapOvr>
-    <a:masterClrMapping/>
-  </p:clrMapOvr>
-</p:sld>
-</file>
-
-<file path=ppt/slides/slide9.xml><?xml version="1.0" encoding="utf-8"?>
 <p:sld xmlns:a="http://schemas.openxmlformats.org/drawingml/2006/main" xmlns:r="http://schemas.openxmlformats.org/officeDocument/2006/relationships" xmlns:p="http://schemas.openxmlformats.org/presentationml/2006/main">
   <p:cSld>
     <p:spTree>
